--- a/public/sertifikat_default.pptx
+++ b/public/sertifikat_default.pptx
@@ -11,16 +11,20 @@
   <p:notesSz cx="6858000" cy="9144000"/>
   <p:embeddedFontLst>
     <p:embeddedFont>
-      <p:font typeface="Canva Sans" panose="020B0604020202020204" charset="0"/>
+      <p:font typeface="Algerian" panose="04020705040A02060702" pitchFamily="82" charset="0"/>
       <p:regular r:id="rId3"/>
     </p:embeddedFont>
     <p:embeddedFont>
-      <p:font typeface="Canva Sans Bold" panose="020B0604020202020204" charset="0"/>
+      <p:font typeface="Canva Sans" panose="020B0604020202020204" charset="0"/>
       <p:regular r:id="rId4"/>
     </p:embeddedFont>
     <p:embeddedFont>
+      <p:font typeface="Canva Sans Bold" panose="020B0604020202020204" charset="0"/>
+      <p:regular r:id="rId5"/>
+    </p:embeddedFont>
+    <p:embeddedFont>
       <p:font typeface="Garet Bold" panose="020B0604020202020204" charset="0"/>
-      <p:regular r:id="rId5"/>
+      <p:regular r:id="rId6"/>
     </p:embeddedFont>
   </p:embeddedFontLst>
   <p:defaultTextStyle>
@@ -326,7 +330,7 @@
             <a:fld id="{1D8BD707-D9CF-40AE-B4C6-C98DA3205C09}" type="datetimeFigureOut">
               <a:rPr lang="en-US" smtClean="0"/>
               <a:pPr/>
-              <a:t>6/29/2026</a:t>
+              <a:t>6/30/2026</a:t>
             </a:fld>
             <a:endParaRPr lang="en-US"/>
           </a:p>
@@ -491,7 +495,7 @@
             <a:fld id="{1D8BD707-D9CF-40AE-B4C6-C98DA3205C09}" type="datetimeFigureOut">
               <a:rPr lang="en-US" smtClean="0"/>
               <a:pPr/>
-              <a:t>6/29/2026</a:t>
+              <a:t>6/30/2026</a:t>
             </a:fld>
             <a:endParaRPr lang="en-US"/>
           </a:p>
@@ -666,7 +670,7 @@
             <a:fld id="{1D8BD707-D9CF-40AE-B4C6-C98DA3205C09}" type="datetimeFigureOut">
               <a:rPr lang="en-US" smtClean="0"/>
               <a:pPr/>
-              <a:t>6/29/2026</a:t>
+              <a:t>6/30/2026</a:t>
             </a:fld>
             <a:endParaRPr lang="en-US"/>
           </a:p>
@@ -831,7 +835,7 @@
             <a:fld id="{1D8BD707-D9CF-40AE-B4C6-C98DA3205C09}" type="datetimeFigureOut">
               <a:rPr lang="en-US" smtClean="0"/>
               <a:pPr/>
-              <a:t>6/29/2026</a:t>
+              <a:t>6/30/2026</a:t>
             </a:fld>
             <a:endParaRPr lang="en-US"/>
           </a:p>
@@ -1073,7 +1077,7 @@
             <a:fld id="{1D8BD707-D9CF-40AE-B4C6-C98DA3205C09}" type="datetimeFigureOut">
               <a:rPr lang="en-US" smtClean="0"/>
               <a:pPr/>
-              <a:t>6/29/2026</a:t>
+              <a:t>6/30/2026</a:t>
             </a:fld>
             <a:endParaRPr lang="en-US"/>
           </a:p>
@@ -1355,7 +1359,7 @@
             <a:fld id="{1D8BD707-D9CF-40AE-B4C6-C98DA3205C09}" type="datetimeFigureOut">
               <a:rPr lang="en-US" smtClean="0"/>
               <a:pPr/>
-              <a:t>6/29/2026</a:t>
+              <a:t>6/30/2026</a:t>
             </a:fld>
             <a:endParaRPr lang="en-US"/>
           </a:p>
@@ -1771,7 +1775,7 @@
             <a:fld id="{1D8BD707-D9CF-40AE-B4C6-C98DA3205C09}" type="datetimeFigureOut">
               <a:rPr lang="en-US" smtClean="0"/>
               <a:pPr/>
-              <a:t>6/29/2026</a:t>
+              <a:t>6/30/2026</a:t>
             </a:fld>
             <a:endParaRPr lang="en-US"/>
           </a:p>
@@ -1885,7 +1889,7 @@
             <a:fld id="{1D8BD707-D9CF-40AE-B4C6-C98DA3205C09}" type="datetimeFigureOut">
               <a:rPr lang="en-US" smtClean="0"/>
               <a:pPr/>
-              <a:t>6/29/2026</a:t>
+              <a:t>6/30/2026</a:t>
             </a:fld>
             <a:endParaRPr lang="en-US"/>
           </a:p>
@@ -1977,7 +1981,7 @@
             <a:fld id="{1D8BD707-D9CF-40AE-B4C6-C98DA3205C09}" type="datetimeFigureOut">
               <a:rPr lang="en-US" smtClean="0"/>
               <a:pPr/>
-              <a:t>6/29/2026</a:t>
+              <a:t>6/30/2026</a:t>
             </a:fld>
             <a:endParaRPr lang="en-US"/>
           </a:p>
@@ -2249,7 +2253,7 @@
             <a:fld id="{1D8BD707-D9CF-40AE-B4C6-C98DA3205C09}" type="datetimeFigureOut">
               <a:rPr lang="en-US" smtClean="0"/>
               <a:pPr/>
-              <a:t>6/29/2026</a:t>
+              <a:t>6/30/2026</a:t>
             </a:fld>
             <a:endParaRPr lang="en-US"/>
           </a:p>
@@ -2498,7 +2502,7 @@
             <a:fld id="{1D8BD707-D9CF-40AE-B4C6-C98DA3205C09}" type="datetimeFigureOut">
               <a:rPr lang="en-US" smtClean="0"/>
               <a:pPr/>
-              <a:t>6/29/2026</a:t>
+              <a:t>6/30/2026</a:t>
             </a:fld>
             <a:endParaRPr lang="en-US"/>
           </a:p>
@@ -2706,7 +2710,7 @@
             <a:fld id="{1D8BD707-D9CF-40AE-B4C6-C98DA3205C09}" type="datetimeFigureOut">
               <a:rPr lang="en-US" smtClean="0"/>
               <a:pPr/>
-              <a:t>6/29/2026</a:t>
+              <a:t>6/30/2026</a:t>
             </a:fld>
             <a:endParaRPr lang="en-US"/>
           </a:p>
@@ -3532,7 +3536,7 @@
         <p:spPr>
           <a:xfrm>
             <a:off x="1048842" y="2345215"/>
-            <a:ext cx="8594317" cy="539877"/>
+            <a:ext cx="8594317" cy="536750"/>
           </a:xfrm>
           <a:prstGeom prst="rect">
             <a:avLst/>
@@ -3576,7 +3580,7 @@
         <p:spPr>
           <a:xfrm>
             <a:off x="1452371" y="3866838"/>
-            <a:ext cx="7787258" cy="536750"/>
+            <a:ext cx="7787258" cy="818879"/>
           </a:xfrm>
           <a:prstGeom prst="rect">
             <a:avLst/>
@@ -3631,7 +3635,7 @@
             </a:r>
           </a:p>
           <a:p>
-            <a:pPr marL="0" lvl="0" indent="0" algn="ctr">
+            <a:pPr lvl="0" algn="ctr">
               <a:lnSpc>
                 <a:spcPts val="2183"/>
               </a:lnSpc>
@@ -3639,6 +3643,30 @@
                 <a:spcPct val="0"/>
               </a:spcBef>
             </a:pPr>
+            <a:r>
+              <a:rPr lang="en-US" sz="1299" b="1">
+                <a:solidFill>
+                  <a:srgbClr val="000000"/>
+                </a:solidFill>
+                <a:latin typeface="Canva Sans Bold"/>
+                <a:ea typeface="Canva Sans Bold"/>
+                <a:cs typeface="Canva Sans Bold"/>
+                <a:sym typeface="Canva Sans Bold"/>
+              </a:rPr>
+              <a:t>Ujian Dinas / Ujian Penyesuaian Kenaikan Pangkat </a:t>
+            </a:r>
+            <a:r>
+              <a:rPr lang="en-US" sz="1299">
+                <a:solidFill>
+                  <a:srgbClr val="000000"/>
+                </a:solidFill>
+                <a:latin typeface="Canva Sans"/>
+                <a:ea typeface="Canva Sans"/>
+                <a:cs typeface="Canva Sans"/>
+                <a:sym typeface="Canva Sans"/>
+              </a:rPr>
+              <a:t>Pada Kualifikasi </a:t>
+            </a:r>
             <a:r>
               <a:rPr lang="en-US" sz="1299" b="1">
                 <a:solidFill>
@@ -3899,7 +3927,31 @@
                 <a:cs typeface="Canva Sans"/>
                 <a:sym typeface="Canva Sans"/>
               </a:rPr>
-              <a:t>&lt;&lt;NAMA&gt;&gt;</a:t>
+              <a:t>&lt;&lt;</a:t>
+            </a:r>
+            <a:r>
+              <a:rPr lang="en-US" sz="2800">
+                <a:solidFill>
+                  <a:srgbClr val="000000"/>
+                </a:solidFill>
+                <a:latin typeface="Algerian" panose="04020705040A02060702" pitchFamily="82" charset="0"/>
+                <a:ea typeface="Canva Sans"/>
+                <a:cs typeface="Canva Sans"/>
+                <a:sym typeface="Canva Sans"/>
+              </a:rPr>
+              <a:t>NAMA</a:t>
+            </a:r>
+            <a:r>
+              <a:rPr lang="en-US" sz="2800">
+                <a:solidFill>
+                  <a:srgbClr val="000000"/>
+                </a:solidFill>
+                <a:latin typeface="Canva Sans"/>
+                <a:ea typeface="Canva Sans"/>
+                <a:cs typeface="Canva Sans"/>
+                <a:sym typeface="Canva Sans"/>
+              </a:rPr>
+              <a:t>&gt;&gt;</a:t>
             </a:r>
             <a:endParaRPr lang="en-US" sz="2800" b="1">
               <a:solidFill>
@@ -3955,7 +4007,31 @@
                 <a:cs typeface="Canva Sans"/>
                 <a:sym typeface="Canva Sans"/>
               </a:rPr>
-              <a:t>&lt;&lt;NIP&gt;&gt;</a:t>
+              <a:t>&lt;&lt;</a:t>
+            </a:r>
+            <a:r>
+              <a:rPr lang="en-US" sz="2800">
+                <a:solidFill>
+                  <a:srgbClr val="000000"/>
+                </a:solidFill>
+                <a:latin typeface="Algerian" panose="04020705040A02060702" pitchFamily="82" charset="0"/>
+                <a:ea typeface="Canva Sans"/>
+                <a:cs typeface="Canva Sans"/>
+                <a:sym typeface="Canva Sans"/>
+              </a:rPr>
+              <a:t>NIP</a:t>
+            </a:r>
+            <a:r>
+              <a:rPr lang="en-US" sz="2800">
+                <a:solidFill>
+                  <a:srgbClr val="000000"/>
+                </a:solidFill>
+                <a:latin typeface="Canva Sans"/>
+                <a:ea typeface="Canva Sans"/>
+                <a:cs typeface="Canva Sans"/>
+                <a:sym typeface="Canva Sans"/>
+              </a:rPr>
+              <a:t>&gt;&gt;</a:t>
             </a:r>
             <a:endParaRPr lang="en-US" sz="2800" b="1">
               <a:solidFill>
